--- a/dist/초5/국어/토의와논리적표현/초5_국어_토의와논리적표현_01_주장과근거.pptx
+++ b/dist/초5/국어/토의와논리적표현/초5_국어_토의와논리적표현_01_주장과근거.pptx
@@ -120,13 +120,13 @@
   <p:extLst>
     <p:ext uri="{521415D9-36F7-43E2-AB2F-B90AF26B5E84}">
       <p14:sectionLst xmlns:p14="http://schemas.microsoft.com/office/powerpoint/2010/main">
-        <p14:section name="도입" id="{0be9e3aa-31b2-b6ef-40ba-fc1ded93764a}">
+        <p14:section name="도입" id="{954b4d83-1eb8-49aa-e0ab-9a7312603f6f}">
           <p14:sldIdLst>
             <p14:sldId id="256"/>
             <p14:sldId id="257"/>
           </p14:sldIdLst>
         </p14:section>
-        <p14:section name="개념" id="{cf49c5c7-8e12-6b20-988e-fb0237b1eb49}">
+        <p14:section name="개념" id="{66390c1c-4013-4794-44d5-ddd540719d88}">
           <p14:sldIdLst>
             <p14:sldId id="258"/>
             <p14:sldId id="259"/>
@@ -134,26 +134,26 @@
             <p14:sldId id="261"/>
           </p14:sldIdLst>
         </p14:section>
-        <p14:section name="연습" id="{f5b0b458-aae8-84e6-e41b-bd21c8886952}">
+        <p14:section name="연습" id="{d3358158-3d4a-e555-4c06-02657854857d}">
           <p14:sldIdLst>
             <p14:sldId id="262"/>
             <p14:sldId id="263"/>
             <p14:sldId id="264"/>
           </p14:sldIdLst>
         </p14:section>
-        <p14:section name="확인" id="{ef7c4c22-f9eb-8f9d-3787-8103909f4e34}">
+        <p14:section name="확인" id="{716dee0f-fcee-81fc-e478-a55d4dac1426}">
           <p14:sldIdLst>
             <p14:sldId id="265"/>
             <p14:sldId id="266"/>
             <p14:sldId id="267"/>
           </p14:sldIdLst>
         </p14:section>
-        <p14:section name="정리" id="{0720e032-10c4-58b8-a27d-1fe366c35c33}">
+        <p14:section name="정리" id="{59745bd1-4313-a565-0779-2ffe62f4450b}">
           <p14:sldIdLst>
             <p14:sldId id="268"/>
           </p14:sldIdLst>
         </p14:section>
-        <p14:section name="보충" id="{3fdd5a40-f40c-8cf5-5c9f-ba018ec6ceae}">
+        <p14:section name="보충" id="{5ae4be3e-fcad-8bee-a162-e2f2dc99e1b7}">
           <p14:sldIdLst>
             <p14:sldId id="269"/>
           </p14:sldIdLst>
